--- a/assets/pptx/catalog-442.pptx
+++ b/assets/pptx/catalog-442.pptx
@@ -3249,7 +3249,7 @@
                 <a:ea typeface="Ebrima"/>
                 <a:cs typeface="Ebrima"/>
               </a:rPr>
-              <a:t>ስራህ ግሩም እና ድንቅ ነው (3x)</a:t>
+              <a:t>ስራህ ግሩም እና ድንቅ ነው 3x</a:t>
             </a:r>
           </a:p>
           <a:p>
@@ -3285,7 +3285,7 @@
                 <a:ea typeface="Ebrima"/>
                 <a:cs typeface="Ebrima"/>
               </a:rPr>
-              <a:t>ክብርህ ግሩም እና ድንቅ ነው (3x)</a:t>
+              <a:t>ክብርህ ግሩም እና ድንቅ ነው 3x</a:t>
             </a:r>
           </a:p>
           <a:p>
@@ -3370,7 +3370,7 @@
                 <a:ea typeface="Ebrima"/>
                 <a:cs typeface="Ebrima"/>
               </a:rPr>
-              <a:t>ስራህ ግሩም (Track 12)</a:t>
+              <a:t>ስራህ ግሩም Track 12</a:t>
             </a:r>
           </a:p>
         </p:txBody>
@@ -3437,7 +3437,7 @@
                 <a:ea typeface="Ebrima"/>
                 <a:cs typeface="Ebrima"/>
               </a:rPr>
-              <a:t>(ግሩም ግሩም ግሩም እና ድንቅ….. ነህ እግዚአብሔር )</a:t>
+              <a:t>ግሩም ግሩም ግሩም እና ድንቅ….. ነህ እግዚአብሔር</a:t>
             </a:r>
           </a:p>
         </p:txBody>
@@ -3594,7 +3594,7 @@
                 <a:ea typeface="Ebrima"/>
                 <a:cs typeface="Ebrima"/>
               </a:rPr>
-              <a:t>ስራው የእኔ እኮ ነው ብለኸኛል ታማኝ (2x)</a:t>
+              <a:t>ስራው የእኔ እኮ ነው ብለኸኛል ታማኝ 2x</a:t>
             </a:r>
           </a:p>
         </p:txBody>
@@ -3818,7 +3818,7 @@
                 <a:ea typeface="Ebrima"/>
                 <a:cs typeface="Ebrima"/>
               </a:rPr>
-              <a:t>ስራህ ግሩም እና ድንቅ ነው (3x)</a:t>
+              <a:t>ስራህ ግሩም እና ድንቅ ነው 3x</a:t>
             </a:r>
           </a:p>
           <a:p>
@@ -3854,7 +3854,7 @@
                 <a:ea typeface="Ebrima"/>
                 <a:cs typeface="Ebrima"/>
               </a:rPr>
-              <a:t>ክብርህ ግሩም እና ድንቅ ነው (3x)</a:t>
+              <a:t>ክብርህ ግሩም እና ድንቅ ነው 3x</a:t>
             </a:r>
           </a:p>
           <a:p>
@@ -4132,7 +4132,7 @@
                 <a:ea typeface="Ebrima"/>
                 <a:cs typeface="Ebrima"/>
               </a:rPr>
-              <a:t>ስራህ ግሩም እና ድንቅ ነው (3x)</a:t>
+              <a:t>ስራህ ግሩም እና ድንቅ ነው 3x</a:t>
             </a:r>
           </a:p>
           <a:p>
@@ -4168,7 +4168,7 @@
                 <a:ea typeface="Ebrima"/>
                 <a:cs typeface="Ebrima"/>
               </a:rPr>
-              <a:t>ክብርህ ግሩም እና ድንቅ ነው (3x)</a:t>
+              <a:t>ክብርህ ግሩም እና ድንቅ ነው 3x</a:t>
             </a:r>
           </a:p>
           <a:p>
